--- a/docs/VTA_Service_Overview.pptx
+++ b/docs/VTA_Service_Overview.pptx
@@ -3227,7 +3227,7 @@
                 </a:solidFill>
                 <a:latin typeface="Calibri"/>
               </a:rPr>
-              <a:t>First Person Network  |  February 2026</a:t>
+              <a:t>First Person Network  |  March 2026</a:t>
             </a:r>
           </a:p>
           <a:p>
@@ -3243,7 +3243,7 @@
                 </a:solidFill>
                 <a:latin typeface="Calibri"/>
               </a:rPr>
-              <a:t>vtc-vta-rs workspace: VTA Service · VTC Service · PNM CLI · CNM CLI</a:t>
+              <a:t>verifiable-trust-infrastructure workspace: VTA Service · VTC Service · PNM CLI · CNM CLI · VTA SDK</a:t>
             </a:r>
           </a:p>
         </p:txBody>
@@ -4817,7 +4817,7 @@
                 </a:solidFill>
                 <a:latin typeface="Calibri"/>
               </a:rPr>
-              <a:t>  [general]     —  name, log_level, log_format</a:t>
+              <a:t>  [vta]         —  did, name, public_url</a:t>
             </a:r>
           </a:p>
           <a:p>
@@ -4849,7 +4849,7 @@
                 </a:solidFill>
                 <a:latin typeface="Calibri"/>
               </a:rPr>
-              <a:t>  [rest]        —  public_url, host, port</a:t>
+              <a:t>  [server]      —  host, port</a:t>
             </a:r>
           </a:p>
           <a:p>
@@ -4913,39 +4913,39 @@
                 </a:solidFill>
                 <a:latin typeface="Calibri"/>
               </a:rPr>
-              <a:t>  [secrets]     —  seed storage backend config</a:t>
-            </a:r>
-          </a:p>
-          <a:p>
-            <a:pPr>
-              <a:spcBef>
-                <a:spcPts val="200"/>
-              </a:spcBef>
-            </a:pPr>
-            <a:r>
-              <a:rPr sz="1000" b="0">
-                <a:solidFill>
-                  <a:srgbClr val="333333"/>
-                </a:solidFill>
-                <a:latin typeface="Calibri"/>
-              </a:rPr>
-              <a:t>  [didcomm]     —  mediator_did</a:t>
-            </a:r>
-          </a:p>
-          <a:p>
-            <a:pPr>
-              <a:spcBef>
-                <a:spcPts val="200"/>
-              </a:spcBef>
-            </a:pPr>
-            <a:r>
-              <a:rPr sz="1000" b="0">
-                <a:solidFill>
-                  <a:srgbClr val="333333"/>
-                </a:solidFill>
-                <a:latin typeface="Calibri"/>
-              </a:rPr>
-              <a:t>  [did]         —  vta_did</a:t>
+              <a:t>  [secrets]     —  seed storage backend config (runtime-selectable)</a:t>
+            </a:r>
+          </a:p>
+          <a:p>
+            <a:pPr>
+              <a:spcBef>
+                <a:spcPts val="200"/>
+              </a:spcBef>
+            </a:pPr>
+            <a:r>
+              <a:rPr sz="1000" b="0">
+                <a:solidFill>
+                  <a:srgbClr val="333333"/>
+                </a:solidFill>
+                <a:latin typeface="Calibri"/>
+              </a:rPr>
+              <a:t>  [messaging]   —  mediator_did</a:t>
+            </a:r>
+          </a:p>
+          <a:p>
+            <a:pPr>
+              <a:spcBef>
+                <a:spcPts val="200"/>
+              </a:spcBef>
+            </a:pPr>
+            <a:r>
+              <a:rPr sz="1000" b="0">
+                <a:solidFill>
+                  <a:srgbClr val="333333"/>
+                </a:solidFill>
+                <a:latin typeface="Calibri"/>
+              </a:rPr>
+              <a:t>  [log]         —  level, format (text/json)</a:t>
             </a:r>
           </a:p>
           <a:p>
@@ -5267,7 +5267,7 @@
                 </a:solidFill>
                 <a:latin typeface="Calibri"/>
               </a:rPr>
-              <a:t>Seed Storage Backends (by priority)</a:t>
+              <a:t>Seed Storage Backends (runtime-selectable)</a:t>
             </a:r>
           </a:p>
           <a:p>
@@ -5427,7 +5427,7 @@
                 </a:solidFill>
                 <a:latin typeface="Calibri"/>
               </a:rPr>
-              <a:t>  Plaintext: NOT recommended (warns on use)</a:t>
+              <a:t>  Selected via config.toml [secrets] section</a:t>
             </a:r>
           </a:p>
         </p:txBody>
@@ -5941,23 +5941,23 @@
                 </a:solidFill>
                 <a:latin typeface="Calibri"/>
               </a:rPr>
-              <a:t>  affinidi-tdk 0.4             —  DIDComm messaging, secrets resolver, DID crypto, ATM client</a:t>
-            </a:r>
-          </a:p>
-          <a:p>
-            <a:pPr>
-              <a:spcBef>
-                <a:spcPts val="200"/>
-              </a:spcBef>
-            </a:pPr>
-            <a:r>
-              <a:rPr sz="1000" b="0">
-                <a:solidFill>
-                  <a:srgbClr val="333333"/>
-                </a:solidFill>
-                <a:latin typeface="Calibri"/>
-              </a:rPr>
-              <a:t>  affinidi-did-resolver-cache-sdk  —  DID resolution (not re-exported by tdk, explicit dependency)</a:t>
+              <a:t>  affinidi-tdk 0.6             —  DIDComm messaging, secrets resolver, DID crypto, ATM client</a:t>
+            </a:r>
+          </a:p>
+          <a:p>
+            <a:pPr>
+              <a:spcBef>
+                <a:spcPts val="200"/>
+              </a:spcBef>
+            </a:pPr>
+            <a:r>
+              <a:rPr sz="1000" b="0">
+                <a:solidFill>
+                  <a:srgbClr val="333333"/>
+                </a:solidFill>
+                <a:latin typeface="Calibri"/>
+              </a:rPr>
+              <a:t>  affinidi-did-resolver-cache-sdk 0.8  —  DID resolution (in-memory cache with TTL)</a:t>
             </a:r>
           </a:p>
           <a:p>
@@ -6021,7 +6021,7 @@
                 </a:solidFill>
                 <a:latin typeface="Calibri"/>
               </a:rPr>
-              <a:t>  ed25519-dalek-bip32           —  BIP-32 hierarchical deterministic key derivation</a:t>
+              <a:t>  didwebvh-rs 0.3               —  did:webvh create, update, deactivate (incl. serverless)</a:t>
             </a:r>
           </a:p>
           <a:p>
@@ -6318,7 +6318,7 @@
                 </a:solidFill>
                 <a:latin typeface="Calibri"/>
               </a:rPr>
-              <a:t>Organizes keys into named contexts (e.g., 'vta', 'mediator', 'community')</a:t>
+              <a:t>Context provisioning for portable application onboarding bundles</a:t>
             </a:r>
           </a:p>
           <a:p>
@@ -6961,7 +6961,7 @@
                 </a:solidFill>
                 <a:latin typeface="Calibri"/>
               </a:rPr>
-              <a:t>VTA Service</a:t>
+              <a:t>VTA Service  v0.1.2</a:t>
             </a:r>
           </a:p>
           <a:p>
@@ -7025,23 +7025,23 @@
                 </a:solidFill>
                 <a:latin typeface="Calibri"/>
               </a:rPr>
-              <a:t>  fjall embedded KV store</a:t>
-            </a:r>
-          </a:p>
-          <a:p>
-            <a:pPr>
-              <a:spcBef>
-                <a:spcPts val="200"/>
-              </a:spcBef>
-            </a:pPr>
-            <a:r>
-              <a:rPr sz="1000" b="0">
-                <a:solidFill>
-                  <a:srgbClr val="333333"/>
-                </a:solidFill>
-                <a:latin typeface="Calibri"/>
-              </a:rPr>
-              <a:t>  Default port: 8100</a:t>
+              <a:t>  Context provisioning + cascading delete</a:t>
+            </a:r>
+          </a:p>
+          <a:p>
+            <a:pPr>
+              <a:spcBef>
+                <a:spcPts val="200"/>
+              </a:spcBef>
+            </a:pPr>
+            <a:r>
+              <a:rPr sz="1000" b="0">
+                <a:solidFill>
+                  <a:srgbClr val="333333"/>
+                </a:solidFill>
+                <a:latin typeface="Calibri"/>
+              </a:rPr>
+              <a:t>  Serverless did:webvh support</a:t>
             </a:r>
           </a:p>
         </p:txBody>
@@ -7130,7 +7130,7 @@
                 </a:solidFill>
                 <a:latin typeface="Calibri"/>
               </a:rPr>
-              <a:t>VTC Service</a:t>
+              <a:t>VTC Service  v0.1.1</a:t>
             </a:r>
           </a:p>
           <a:p>
@@ -7299,7 +7299,7 @@
                 </a:solidFill>
                 <a:latin typeface="Calibri"/>
               </a:rPr>
-              <a:t>PNM CLI</a:t>
+              <a:t>PNM CLI  v0.1.1</a:t>
             </a:r>
           </a:p>
           <a:p>
@@ -7347,39 +7347,39 @@
                 </a:solidFill>
                 <a:latin typeface="Calibri"/>
               </a:rPr>
-              <a:t>  Interactive setup wizard</a:t>
-            </a:r>
-          </a:p>
-          <a:p>
-            <a:pPr>
-              <a:spcBef>
-                <a:spcPts val="200"/>
-              </a:spcBef>
-            </a:pPr>
-            <a:r>
-              <a:rPr sz="1000" b="0">
-                <a:solidFill>
-                  <a:srgbClr val="333333"/>
-                </a:solidFill>
-                <a:latin typeface="Calibri"/>
-              </a:rPr>
-              <a:t>  WebVH DID operations</a:t>
-            </a:r>
-          </a:p>
-          <a:p>
-            <a:pPr>
-              <a:spcBef>
-                <a:spcPts val="200"/>
-              </a:spcBef>
-            </a:pPr>
-            <a:r>
-              <a:rPr sz="1000" b="0">
-                <a:solidFill>
-                  <a:srgbClr val="333333"/>
-                </a:solidFill>
-                <a:latin typeface="Calibri"/>
-              </a:rPr>
-              <a:t>  Keys, contexts, ACL commands</a:t>
+              <a:t>  Context provision/reprovision</a:t>
+            </a:r>
+          </a:p>
+          <a:p>
+            <a:pPr>
+              <a:spcBef>
+                <a:spcPts val="200"/>
+              </a:spcBef>
+            </a:pPr>
+            <a:r>
+              <a:rPr sz="1000" b="0">
+                <a:solidFill>
+                  <a:srgbClr val="333333"/>
+                </a:solidFill>
+                <a:latin typeface="Calibri"/>
+              </a:rPr>
+              <a:t>  Keys bundle export</a:t>
+            </a:r>
+          </a:p>
+          <a:p>
+            <a:pPr>
+              <a:spcBef>
+                <a:spcPts val="200"/>
+              </a:spcBef>
+            </a:pPr>
+            <a:r>
+              <a:rPr sz="1000" b="0">
+                <a:solidFill>
+                  <a:srgbClr val="333333"/>
+                </a:solidFill>
+                <a:latin typeface="Calibri"/>
+              </a:rPr>
+              <a:t>  WebVH + serverless DIDs</a:t>
             </a:r>
           </a:p>
         </p:txBody>
@@ -7468,7 +7468,7 @@
                 </a:solidFill>
                 <a:latin typeface="Calibri"/>
               </a:rPr>
-              <a:t>CNM CLI</a:t>
+              <a:t>CNM CLI  v0.1.1</a:t>
             </a:r>
           </a:p>
           <a:p>
@@ -7637,7 +7637,7 @@
                 </a:solidFill>
                 <a:latin typeface="Calibri"/>
               </a:rPr>
-              <a:t>VTA SDK</a:t>
+              <a:t>VTA SDK  v0.1.1</a:t>
             </a:r>
           </a:p>
           <a:p>
@@ -7685,7 +7685,23 @@
                 </a:solidFill>
                 <a:latin typeface="Calibri"/>
               </a:rPr>
-              <a:t>  Auth session management</a:t>
+              <a:t>  Pluggable SessionBackend trait</a:t>
+            </a:r>
+          </a:p>
+          <a:p>
+            <a:pPr>
+              <a:spcBef>
+                <a:spcPts val="200"/>
+              </a:spcBef>
+            </a:pPr>
+            <a:r>
+              <a:rPr sz="1000" b="0">
+                <a:solidFill>
+                  <a:srgbClr val="333333"/>
+                </a:solidFill>
+                <a:latin typeface="Calibri"/>
+              </a:rPr>
+              <a:t>  Context provision bundle codec</a:t>
             </a:r>
           </a:p>
           <a:p>
@@ -7702,22 +7718,6 @@
                 <a:latin typeface="Calibri"/>
               </a:rPr>
               <a:t>  Used by PNM and CNM CLIs</a:t>
-            </a:r>
-          </a:p>
-          <a:p>
-            <a:pPr>
-              <a:spcBef>
-                <a:spcPts val="200"/>
-              </a:spcBef>
-            </a:pPr>
-            <a:r>
-              <a:rPr sz="1000" b="0">
-                <a:solidFill>
-                  <a:srgbClr val="333333"/>
-                </a:solidFill>
-                <a:latin typeface="Calibri"/>
-              </a:rPr>
-              <a:t>  Typed API wrappers</a:t>
             </a:r>
           </a:p>
         </p:txBody>
@@ -7814,7 +7814,7 @@
                 </a:solidFill>
                 <a:latin typeface="Calibri"/>
               </a:rPr>
-              <a:t>affinidi-tdk 0.4 — DIDComm messaging, secrets resolver, DID crypto</a:t>
+              <a:t>affinidi-tdk 0.6 — DIDComm messaging, secrets resolver, DID crypto</a:t>
             </a:r>
           </a:p>
           <a:p>
@@ -7833,7 +7833,7 @@
                 </a:solidFill>
                 <a:latin typeface="Calibri"/>
               </a:rPr>
-              <a:t>affinidi-did-resolver-cache-sdk — DID resolution with in-memory cache</a:t>
+              <a:t>affinidi-did-resolver-cache-sdk 0.8 — DID resolution with in-memory cache</a:t>
             </a:r>
           </a:p>
           <a:p>
@@ -7871,7 +7871,7 @@
                 </a:solidFill>
                 <a:latin typeface="Calibri"/>
               </a:rPr>
-              <a:t>jsonwebtoken 10 with EdDSA (Ed25519) — JWT-based REST authentication</a:t>
+              <a:t>didwebvh-rs 0.3 — Verifiable History DID method (create, update, deactivate)</a:t>
             </a:r>
           </a:p>
         </p:txBody>
@@ -8136,7 +8136,7 @@
                 </a:solidFill>
                 <a:latin typeface="Calibri"/>
               </a:rPr>
-              <a:t>Context-scoped access control for admin delegation</a:t>
+              <a:t>Context provisioning: single-step create + admin credential bundle</a:t>
             </a:r>
           </a:p>
           <a:p>
@@ -8231,7 +8231,7 @@
                 </a:solidFill>
                 <a:latin typeface="Calibri"/>
               </a:rPr>
-              <a:t>Storage — fjall Keyspaces</a:t>
+              <a:t>Storage — fjall Keyspaces (v0.1.2)</a:t>
             </a:r>
           </a:p>
           <a:p>
@@ -8326,7 +8326,7 @@
                 </a:solidFill>
                 <a:latin typeface="Calibri"/>
               </a:rPr>
-              <a:t>webvh — server and DID records (feature-gated)</a:t>
+              <a:t>webvh — server records, DID records, DID logs</a:t>
             </a:r>
           </a:p>
         </p:txBody>
@@ -9116,7 +9116,7 @@
                 </a:solidFill>
                 <a:latin typeface="Calibri"/>
               </a:rPr>
-              <a:t>VTA</a:t>
+              <a:t>VTA  v0.1.2</a:t>
             </a:r>
           </a:p>
           <a:p>
@@ -9314,7 +9314,7 @@
                 </a:solidFill>
                 <a:latin typeface="Calibri"/>
               </a:rPr>
-              <a:t>VTC</a:t>
+              <a:t>VTC  v0.1.1</a:t>
             </a:r>
           </a:p>
           <a:p>
@@ -9844,6 +9844,22 @@
                 </a:solidFill>
                 <a:latin typeface="Calibri"/>
               </a:rPr>
+              <a:t>    contexts provision/reprovision</a:t>
+            </a:r>
+          </a:p>
+          <a:p>
+            <a:pPr>
+              <a:spcBef>
+                <a:spcPts val="200"/>
+              </a:spcBef>
+            </a:pPr>
+            <a:r>
+              <a:rPr sz="1000" b="0">
+                <a:solidFill>
+                  <a:srgbClr val="333333"/>
+                </a:solidFill>
+                <a:latin typeface="Calibri"/>
+              </a:rPr>
               <a:t>    acl list/get/create/update/delete</a:t>
             </a:r>
           </a:p>
@@ -9876,39 +9892,23 @@
                 </a:solidFill>
                 <a:latin typeface="Calibri"/>
               </a:rPr>
-              <a:t>    setup           —  Interactive VTA setup wizard</a:t>
-            </a:r>
-          </a:p>
-          <a:p>
-            <a:pPr>
-              <a:spcBef>
-                <a:spcPts val="200"/>
-              </a:spcBef>
-            </a:pPr>
-            <a:r>
-              <a:rPr sz="1000" b="0">
-                <a:solidFill>
-                  <a:srgbClr val="333333"/>
-                </a:solidFill>
-                <a:latin typeface="Calibri"/>
-              </a:rPr>
-              <a:t>  </a:t>
-            </a:r>
-          </a:p>
-          <a:p>
-            <a:pPr>
-              <a:spcBef>
-                <a:spcPts val="200"/>
-              </a:spcBef>
-            </a:pPr>
-            <a:r>
-              <a:rPr sz="1000" b="0">
-                <a:solidFill>
-                  <a:srgbClr val="333333"/>
-                </a:solidFill>
-                <a:latin typeface="Calibri"/>
-              </a:rPr>
-              <a:t>  WebVH Commands (PNM only):</a:t>
+              <a:t>    keys bundle             —  Export DID secrets bundle</a:t>
+            </a:r>
+          </a:p>
+          <a:p>
+            <a:pPr>
+              <a:spcBef>
+                <a:spcPts val="200"/>
+              </a:spcBef>
+            </a:pPr>
+            <a:r>
+              <a:rPr sz="1000" b="0">
+                <a:solidFill>
+                  <a:srgbClr val="333333"/>
+                </a:solidFill>
+                <a:latin typeface="Calibri"/>
+              </a:rPr>
+              <a:t>    setup                   —  Interactive VTA setup wizard</a:t>
             </a:r>
           </a:p>
           <a:p>
@@ -9940,7 +9940,7 @@
                 </a:solidFill>
                 <a:latin typeface="Calibri"/>
               </a:rPr>
-              <a:t>    webvh create-did / list-dids / get-did / delete-did</a:t>
+              <a:t>    webvh create-did (incl. serverless) / list-dids / get-did / delete-did</a:t>
             </a:r>
           </a:p>
         </p:txBody>
@@ -10436,7 +10436,7 @@
                 </a:solidFill>
                 <a:latin typeface="Calibri"/>
               </a:rPr>
-              <a:t>Supports portability and pre-rotation keys</a:t>
+              <a:t>Supports portability, pre-rotation keys, and serverless mode</a:t>
             </a:r>
           </a:p>
           <a:p>
@@ -11042,39 +11042,39 @@
                 </a:solidFill>
                 <a:latin typeface="Calibri"/>
               </a:rPr>
-              <a:t>  5. Sign and publish did.jsonl log entry</a:t>
-            </a:r>
-          </a:p>
-          <a:p>
-            <a:pPr>
-              <a:spcBef>
-                <a:spcPts val="200"/>
-              </a:spcBef>
-            </a:pPr>
-            <a:r>
-              <a:rPr sz="1000" b="0">
-                <a:solidFill>
-                  <a:srgbClr val="333333"/>
-                </a:solidFill>
-                <a:latin typeface="Calibri"/>
-              </a:rPr>
-              <a:t>  6. Store DID record in fjall webvh keyspace</a:t>
-            </a:r>
-          </a:p>
-          <a:p>
-            <a:pPr>
-              <a:spcBef>
-                <a:spcPts val="200"/>
-              </a:spcBef>
-            </a:pPr>
-            <a:r>
-              <a:rPr sz="1000" b="0">
-                <a:solidFill>
-                  <a:srgbClr val="333333"/>
-                </a:solidFill>
-                <a:latin typeface="Calibri"/>
-              </a:rPr>
-              <a:t>  7. Update/deactivate via signed log entries</a:t>
+              <a:t>  7. Serverless mode: self-host DID document + log locally</a:t>
+            </a:r>
+          </a:p>
+          <a:p>
+            <a:pPr>
+              <a:spcBef>
+                <a:spcPts val="200"/>
+              </a:spcBef>
+            </a:pPr>
+            <a:r>
+              <a:rPr sz="1000" b="0">
+                <a:solidFill>
+                  <a:srgbClr val="333333"/>
+                </a:solidFill>
+                <a:latin typeface="Calibri"/>
+              </a:rPr>
+              <a:t>  8. Store DID record and logs in fjall webvh keyspace</a:t>
+            </a:r>
+          </a:p>
+          <a:p>
+            <a:pPr>
+              <a:spcBef>
+                <a:spcPts val="200"/>
+              </a:spcBef>
+            </a:pPr>
+            <a:r>
+              <a:rPr sz="1000" b="0">
+                <a:solidFill>
+                  <a:srgbClr val="333333"/>
+                </a:solidFill>
+                <a:latin typeface="Calibri"/>
+              </a:rPr>
+              <a:t>  9. Update/deactivate via signed log entries</a:t>
             </a:r>
           </a:p>
         </p:txBody>
